--- a/dist/초4/수학/자료와규칙/초4_수학_자료와규칙_03_계산식의규칙_학생용.pptx
+++ b/dist/초4/수학/자료와규칙/초4_수학_자료와규칙_03_계산식의규칙_학생용.pptx
@@ -119,20 +119,20 @@
   <p:extLst>
     <p:ext uri="{521415D9-36F7-43E2-AB2F-B90AF26B5E84}">
       <p14:sectionLst xmlns:p14="http://schemas.microsoft.com/office/powerpoint/2010/main">
-        <p14:section name="도입" id="{1760d0f9-d56a-059d-ef29-b7100a69fca5}">
+        <p14:section name="도입" id="{5ecd74b1-598f-d89d-0985-b508453f817e}">
           <p14:sldIdLst>
             <p14:sldId id="256"/>
             <p14:sldId id="257"/>
           </p14:sldIdLst>
         </p14:section>
-        <p14:section name="개념" id="{f7b0e694-e926-9025-fa24-82136f713846}">
+        <p14:section name="개념" id="{a5a333cd-7f50-2f27-e414-d1623010b91e}">
           <p14:sldIdLst>
             <p14:sldId id="258"/>
             <p14:sldId id="260"/>
             <p14:sldId id="261"/>
           </p14:sldIdLst>
         </p14:section>
-        <p14:section name="연습" id="{b9506ad9-7a08-3e5a-a2d0-dac67e6190a5}">
+        <p14:section name="연습" id="{6b17d415-b2f1-8651-4b7a-736e765a3e52}">
           <p14:sldIdLst>
             <p14:sldId id="259"/>
             <p14:sldId id="262"/>
@@ -140,24 +140,24 @@
             <p14:sldId id="264"/>
           </p14:sldIdLst>
         </p14:section>
-        <p14:section name="개념" id="{01e73990-1ac9-9070-96f5-9d62be32bdaa}">
+        <p14:section name="개념" id="{c32c220e-9542-9d96-a38c-3ee55a7e32a3}">
           <p14:sldIdLst/>
         </p14:section>
-        <p14:section name="연습" id="{2d10b049-4fa5-eeef-5554-9b7f7b20a606}">
+        <p14:section name="연습" id="{7a36445e-7b61-5858-92dc-01a7c013f271}">
           <p14:sldIdLst/>
         </p14:section>
-        <p14:section name="확인" id="{0e2b01d9-bc7c-2b1c-605a-e89b2a46eae0}">
+        <p14:section name="확인" id="{26eb7575-df3c-f156-153d-ccfe47d0557f}">
           <p14:sldIdLst>
             <p14:sldId id="265"/>
             <p14:sldId id="266"/>
           </p14:sldIdLst>
         </p14:section>
-        <p14:section name="정리" id="{804588ea-4fe1-77ac-3c4a-7cc122323349}">
+        <p14:section name="정리" id="{d5aa7e11-fb6f-778c-5513-9c5a2842a741}">
           <p14:sldIdLst>
             <p14:sldId id="267"/>
           </p14:sldIdLst>
         </p14:section>
-        <p14:section name="보충" id="{39fb1afa-df88-880e-940c-9eca442a8977}">
+        <p14:section name="보충" id="{a42def7e-d16d-349b-0af0-3a3a3ca49b67}">
           <p14:sldIdLst>
             <p14:sldId id="268"/>
           </p14:sldIdLst>
